--- a/test/pptx/gemini_textbox.pptx
+++ b/test/pptx/gemini_textbox.pptx
@@ -3090,7 +3090,7 @@
       <p:grpSpPr/>
       <p:sp>
         <p:nvSpPr>
-          <p:cNvPr id="2" name="TextBox 1" descr="contexts:&#10;- id: 1&#10;model: gemini-2.0-flash&#10;prompt: Summarize the key trends from the data.&#10;type: gemini&#10;"/>
+          <p:cNvPr id="2" name="TextBox 1" descr="contexts:&#10;- sales_data&#10;model: gemini-2.0-flash&#10;prompt: Summarize the key trends from the data.&#10;type: gemini&#10;"/>
           <p:cNvSpPr txBox="1"/>
           <p:nvPr/>
         </p:nvSpPr>
